--- a/CLASH-OF-THE-CLAWS.pptx
+++ b/CLASH-OF-THE-CLAWS.pptx
@@ -31,7 +31,7 @@
       <p:bold r:id="rId14"/>
     </p:embeddedFont>
     <p:embeddedFont>
-      <p:font typeface="Lora" pitchFamily="2" charset="0"/>
+      <p:font typeface="Lora" panose="020F0502020204030204" pitchFamily="2" charset="0"/>
       <p:regular r:id="rId15"/>
     </p:embeddedFont>
   </p:embeddedFontLst>
@@ -2244,7 +2244,29 @@
                 <a:ea typeface="Lora" pitchFamily="34" charset="-122"/>
                 <a:cs typeface="Lora" pitchFamily="34" charset="-120"/>
               </a:rPr>
-              <a:t>Team Members: [Name 1], [Name 2], [Name 3], [Name 4]</a:t>
+              <a:t>Team Members: Mohan E, Ayush Arun, </a:t>
+            </a:r>
+            <a:r>
+              <a:rPr lang="en-US" sz="1100">
+                <a:solidFill>
+                  <a:srgbClr val="2C2821"/>
+                </a:solidFill>
+                <a:latin typeface="Lora" pitchFamily="34" charset="0"/>
+                <a:ea typeface="Lora" pitchFamily="34" charset="-122"/>
+                <a:cs typeface="Lora" pitchFamily="34" charset="-120"/>
+              </a:rPr>
+              <a:t>Sourabh ,Chethan</a:t>
+            </a:r>
+            <a:r>
+              <a:rPr lang="en-US" sz="1100" dirty="0">
+                <a:solidFill>
+                  <a:srgbClr val="2C2821"/>
+                </a:solidFill>
+                <a:latin typeface="Lora" pitchFamily="34" charset="0"/>
+                <a:ea typeface="Lora" pitchFamily="34" charset="-122"/>
+                <a:cs typeface="Lora" pitchFamily="34" charset="-120"/>
+              </a:rPr>
+              <a:t> Kumar M U</a:t>
             </a:r>
             <a:endParaRPr lang="en-US" sz="1100" dirty="0"/>
           </a:p>
